--- a/prototyping/E_sPAR_schematic.pptx
+++ b/prototyping/E_sPAR_schematic.pptx
@@ -899,7 +899,7 @@
                 <a:ea typeface="Calibri" pitchFamily="34" charset="-122"/>
                 <a:cs typeface="Calibri" pitchFamily="34" charset="-120"/>
               </a:rPr>
-              <a:t>E_d</a:t>
+              <a:t>E_s</a:t>
             </a:r>
             <a:r>
               <a:rPr lang="en-US" sz="2200" b="1" dirty="0">
@@ -949,7 +949,7 @@
                 <a:ea typeface="Calibri" pitchFamily="34" charset="-122"/>
                 <a:cs typeface="Calibri" pitchFamily="34" charset="-120"/>
               </a:rPr>
-              <a:t>Land station reference sensor: top-down view on a prototyping breadboard</a:t>
+              <a:t>Surface reference sensor: top-down view on a prototyping breadboard</a:t>
             </a:r>
             <a:endParaRPr lang="en-US" sz="1200" dirty="0"/>
           </a:p>
@@ -6291,7 +6291,7 @@
                 <a:ea typeface="Calibri" pitchFamily="34" charset="-122"/>
                 <a:cs typeface="Calibri" pitchFamily="34" charset="-120"/>
               </a:rPr>
-              <a:t>E_d</a:t>
+              <a:t>E_s</a:t>
             </a:r>
             <a:r>
               <a:rPr lang="en-US" sz="2200" b="1" dirty="0">

--- a/prototyping/E_sPAR_schematic.pptx
+++ b/prototyping/E_sPAR_schematic.pptx
@@ -888,29 +888,7 @@
                 <a:ea typeface="Calibri" pitchFamily="34" charset="-122"/>
                 <a:cs typeface="Calibri" pitchFamily="34" charset="-120"/>
               </a:rPr>
-              <a:t>: </a:t>
-            </a:r>
-            <a:r>
-              <a:rPr lang="en-US" sz="2200" b="1" dirty="0" err="1">
-                <a:solidFill>
-                  <a:srgbClr val="1F2A44"/>
-                </a:solidFill>
-                <a:latin typeface="Calibri" pitchFamily="34" charset="0"/>
-                <a:ea typeface="Calibri" pitchFamily="34" charset="-122"/>
-                <a:cs typeface="Calibri" pitchFamily="34" charset="-120"/>
-              </a:rPr>
-              <a:t>E_s</a:t>
-            </a:r>
-            <a:r>
-              <a:rPr lang="en-US" sz="2200" b="1" dirty="0">
-                <a:solidFill>
-                  <a:srgbClr val="1F2A44"/>
-                </a:solidFill>
-                <a:latin typeface="Calibri" pitchFamily="34" charset="0"/>
-                <a:ea typeface="Calibri" pitchFamily="34" charset="-122"/>
-                <a:cs typeface="Calibri" pitchFamily="34" charset="-120"/>
-              </a:rPr>
-              <a:t>(PAR) breadboard wiring</a:t>
+              <a:t>: E_s(PAR) breadboard wiring</a:t>
             </a:r>
             <a:endParaRPr lang="en-US" sz="2200" dirty="0"/>
           </a:p>
@@ -949,7 +927,7 @@
                 <a:ea typeface="Calibri" pitchFamily="34" charset="-122"/>
                 <a:cs typeface="Calibri" pitchFamily="34" charset="-120"/>
               </a:rPr>
-              <a:t>Surface reference sensor: top-down view on a prototyping breadboard</a:t>
+              <a:t>Land station reference sensor: top-down view on a prototyping breadboard</a:t>
             </a:r>
             <a:endParaRPr lang="en-US" sz="1200" dirty="0"/>
           </a:p>
@@ -6291,7 +6269,7 @@
                 <a:ea typeface="Calibri" pitchFamily="34" charset="-122"/>
                 <a:cs typeface="Calibri" pitchFamily="34" charset="-120"/>
               </a:rPr>
-              <a:t>E_s</a:t>
+              <a:t>E_d</a:t>
             </a:r>
             <a:r>
               <a:rPr lang="en-US" sz="2200" b="1" dirty="0">
@@ -6341,7 +6319,7 @@
                 <a:ea typeface="Calibri" pitchFamily="34" charset="-122"/>
                 <a:cs typeface="Calibri" pitchFamily="34" charset="-120"/>
               </a:rPr>
-              <a:t>Authoritative pin-by-pin reference for build and debug</a:t>
+              <a:t>Authoritative pin-by-pin reference for build</a:t>
             </a:r>
             <a:endParaRPr lang="en-US" sz="1200" dirty="0"/>
           </a:p>
@@ -11993,201 +11971,6 @@
           </a:graphicData>
         </a:graphic>
       </p:graphicFrame>
-      <p:sp>
-        <p:nvSpPr>
-          <p:cNvPr id="5" name="Text 2"/>
-          <p:cNvSpPr/>
-          <p:nvPr/>
-        </p:nvSpPr>
-        <p:spPr>
-          <a:xfrm>
-            <a:off x="365760" y="5623560"/>
-            <a:ext cx="11430000" cy="274320"/>
-          </a:xfrm>
-          <a:prstGeom prst="rect">
-            <a:avLst/>
-          </a:prstGeom>
-          <a:noFill/>
-          <a:ln/>
-        </p:spPr>
-        <p:txBody>
-          <a:bodyPr wrap="square" lIns="0" tIns="0" rIns="0" bIns="0" rtlCol="0" anchor="ctr"/>
-          <a:lstStyle/>
-          <a:p>
-            <a:pPr marL="0" indent="0">
-              <a:buNone/>
-            </a:pPr>
-            <a:r>
-              <a:rPr lang="en-US" sz="1300" b="1" dirty="0">
-                <a:solidFill>
-                  <a:srgbClr val="1F2A44"/>
-                </a:solidFill>
-                <a:latin typeface="Calibri" pitchFamily="34" charset="0"/>
-                <a:ea typeface="Calibri" pitchFamily="34" charset="-122"/>
-                <a:cs typeface="Calibri" pitchFamily="34" charset="-120"/>
-              </a:rPr>
-              <a:t>Notes on bench testing</a:t>
-            </a:r>
-            <a:endParaRPr lang="en-US" sz="1300" dirty="0"/>
-          </a:p>
-        </p:txBody>
-      </p:sp>
-      <p:sp>
-        <p:nvSpPr>
-          <p:cNvPr id="6" name="Text 3"/>
-          <p:cNvSpPr/>
-          <p:nvPr/>
-        </p:nvSpPr>
-        <p:spPr>
-          <a:xfrm>
-            <a:off x="365760" y="5943600"/>
-            <a:ext cx="11430000" cy="201168"/>
-          </a:xfrm>
-          <a:prstGeom prst="rect">
-            <a:avLst/>
-          </a:prstGeom>
-          <a:noFill/>
-          <a:ln/>
-        </p:spPr>
-        <p:txBody>
-          <a:bodyPr wrap="square" lIns="0" tIns="0" rIns="0" bIns="0" rtlCol="0" anchor="ctr"/>
-          <a:lstStyle/>
-          <a:p>
-            <a:pPr marL="0" indent="0">
-              <a:buNone/>
-            </a:pPr>
-            <a:r>
-              <a:rPr lang="en-US" sz="1000" dirty="0">
-                <a:solidFill>
-                  <a:srgbClr val="1F2A44"/>
-                </a:solidFill>
-                <a:latin typeface="Calibri" pitchFamily="34" charset="0"/>
-                <a:ea typeface="Calibri" pitchFamily="34" charset="-122"/>
-                <a:cs typeface="Calibri" pitchFamily="34" charset="-120"/>
-              </a:rPr>
-              <a:t>• Run I2C scanner sketch: both 0x48 (ADS1115) and 0x68 (DS3231) must appear.</a:t>
-            </a:r>
-            <a:endParaRPr lang="en-US" sz="1000" dirty="0"/>
-          </a:p>
-        </p:txBody>
-      </p:sp>
-      <p:sp>
-        <p:nvSpPr>
-          <p:cNvPr id="7" name="Text 4"/>
-          <p:cNvSpPr/>
-          <p:nvPr/>
-        </p:nvSpPr>
-        <p:spPr>
-          <a:xfrm>
-            <a:off x="365760" y="6144768"/>
-            <a:ext cx="11430000" cy="201168"/>
-          </a:xfrm>
-          <a:prstGeom prst="rect">
-            <a:avLst/>
-          </a:prstGeom>
-          <a:noFill/>
-          <a:ln/>
-        </p:spPr>
-        <p:txBody>
-          <a:bodyPr wrap="square" lIns="0" tIns="0" rIns="0" bIns="0" rtlCol="0" anchor="ctr"/>
-          <a:lstStyle/>
-          <a:p>
-            <a:pPr marL="0" indent="0">
-              <a:buNone/>
-            </a:pPr>
-            <a:r>
-              <a:rPr lang="en-US" sz="1000" dirty="0">
-                <a:solidFill>
-                  <a:srgbClr val="1F2A44"/>
-                </a:solidFill>
-                <a:latin typeface="Calibri" pitchFamily="34" charset="0"/>
-                <a:ea typeface="Calibri" pitchFamily="34" charset="-122"/>
-                <a:cs typeface="Calibri" pitchFamily="34" charset="-120"/>
-              </a:rPr>
-              <a:t>• If only one address shows, check SDA/SCL jumpers and common ground.</a:t>
-            </a:r>
-            <a:endParaRPr lang="en-US" sz="1000" dirty="0"/>
-          </a:p>
-        </p:txBody>
-      </p:sp>
-      <p:sp>
-        <p:nvSpPr>
-          <p:cNvPr id="8" name="Text 5"/>
-          <p:cNvSpPr/>
-          <p:nvPr/>
-        </p:nvSpPr>
-        <p:spPr>
-          <a:xfrm>
-            <a:off x="365760" y="6345936"/>
-            <a:ext cx="11430000" cy="201168"/>
-          </a:xfrm>
-          <a:prstGeom prst="rect">
-            <a:avLst/>
-          </a:prstGeom>
-          <a:noFill/>
-          <a:ln/>
-        </p:spPr>
-        <p:txBody>
-          <a:bodyPr wrap="square" lIns="0" tIns="0" rIns="0" bIns="0" rtlCol="0" anchor="ctr"/>
-          <a:lstStyle/>
-          <a:p>
-            <a:pPr marL="0" indent="0">
-              <a:buNone/>
-            </a:pPr>
-            <a:r>
-              <a:rPr lang="en-US" sz="1000" dirty="0">
-                <a:solidFill>
-                  <a:srgbClr val="1F2A44"/>
-                </a:solidFill>
-                <a:latin typeface="Calibri" pitchFamily="34" charset="0"/>
-                <a:ea typeface="Calibri" pitchFamily="34" charset="-122"/>
-                <a:cs typeface="Calibri" pitchFamily="34" charset="-120"/>
-              </a:rPr>
-              <a:t>• SQ-500 is self-powered: never connect it to a voltage rail.</a:t>
-            </a:r>
-            <a:endParaRPr lang="en-US" sz="1000" dirty="0"/>
-          </a:p>
-        </p:txBody>
-      </p:sp>
-      <p:sp>
-        <p:nvSpPr>
-          <p:cNvPr id="9" name="Text 6"/>
-          <p:cNvSpPr/>
-          <p:nvPr/>
-        </p:nvSpPr>
-        <p:spPr>
-          <a:xfrm>
-            <a:off x="365760" y="6547104"/>
-            <a:ext cx="11430000" cy="201168"/>
-          </a:xfrm>
-          <a:prstGeom prst="rect">
-            <a:avLst/>
-          </a:prstGeom>
-          <a:noFill/>
-          <a:ln/>
-        </p:spPr>
-        <p:txBody>
-          <a:bodyPr wrap="square" lIns="0" tIns="0" rIns="0" bIns="0" rtlCol="0" anchor="ctr"/>
-          <a:lstStyle/>
-          <a:p>
-            <a:pPr marL="0" indent="0">
-              <a:buNone/>
-            </a:pPr>
-            <a:r>
-              <a:rPr lang="en-US" sz="1000" dirty="0">
-                <a:solidFill>
-                  <a:srgbClr val="1F2A44"/>
-                </a:solidFill>
-                <a:latin typeface="Calibri" pitchFamily="34" charset="0"/>
-                <a:ea typeface="Calibri" pitchFamily="34" charset="-122"/>
-                <a:cs typeface="Calibri" pitchFamily="34" charset="-120"/>
-              </a:rPr>
-              <a:t>• Teensy pins 18/19 (SDA0/SCL0) are on the right-side header; count from the USB end.</a:t>
-            </a:r>
-            <a:endParaRPr lang="en-US" sz="1000" dirty="0"/>
-          </a:p>
-        </p:txBody>
-      </p:sp>
     </p:spTree>
   </p:cSld>
   <p:clrMapOvr>
